--- a/docs/content/meeting_r/meeting_r_lecture.pptx
+++ b/docs/content/meeting_r/meeting_r_lecture.pptx
@@ -3370,7 +3370,7 @@
             </a:pPr>
             <a:r>
               <a:rPr/>
-              <a:t>2026-09-04</a:t>
+              <a:t>2026-09-08</a:t>
             </a:r>
           </a:p>
         </p:txBody>

--- a/docs/content/meeting_r/meeting_r_lecture.pptx
+++ b/docs/content/meeting_r/meeting_r_lecture.pptx
@@ -3370,7 +3370,7 @@
             </a:pPr>
             <a:r>
               <a:rPr/>
-              <a:t>2026-09-08</a:t>
+              <a:t>2026-09-10</a:t>
             </a:r>
           </a:p>
         </p:txBody>
@@ -9905,10 +9905,121 @@
             <a:r>
               <a:rPr>
                 <a:solidFill>
+                  <a:srgbClr val="5E5E5E"/>
+                </a:solidFill>
+                <a:latin typeface="Courier"/>
+              </a:rPr>
+              <a:t># define the point position ONCE, at the top, so every layer can reuse it</a:t>
+            </a:r>
+            <a:br/>
+            <a:r>
+              <a:rPr>
+                <a:solidFill>
+                  <a:srgbClr val="003B4F"/>
+                </a:solidFill>
+                <a:latin typeface="Courier"/>
+              </a:rPr>
+              <a:t>jitter_pos &lt;- </a:t>
+            </a:r>
+            <a:r>
+              <a:rPr>
+                <a:solidFill>
                   <a:srgbClr val="4758AB"/>
                 </a:solidFill>
                 <a:latin typeface="Courier"/>
               </a:rPr>
+              <a:t>position_jitter</a:t>
+            </a:r>
+            <a:r>
+              <a:rPr>
+                <a:solidFill>
+                  <a:srgbClr val="003B4F"/>
+                </a:solidFill>
+                <a:latin typeface="Courier"/>
+              </a:rPr>
+              <a:t>(</a:t>
+            </a:r>
+            <a:r>
+              <a:rPr>
+                <a:solidFill>
+                  <a:srgbClr val="657422"/>
+                </a:solidFill>
+                <a:latin typeface="Courier"/>
+              </a:rPr>
+              <a:t>width =</a:t>
+            </a:r>
+            <a:r>
+              <a:rPr>
+                <a:solidFill>
+                  <a:srgbClr val="003B4F"/>
+                </a:solidFill>
+                <a:latin typeface="Courier"/>
+              </a:rPr>
+              <a:t> </a:t>
+            </a:r>
+            <a:r>
+              <a:rPr>
+                <a:solidFill>
+                  <a:srgbClr val="AD0000"/>
+                </a:solidFill>
+                <a:latin typeface="Courier"/>
+              </a:rPr>
+              <a:t>0.15</a:t>
+            </a:r>
+            <a:r>
+              <a:rPr>
+                <a:solidFill>
+                  <a:srgbClr val="003B4F"/>
+                </a:solidFill>
+                <a:latin typeface="Courier"/>
+              </a:rPr>
+              <a:t>, </a:t>
+            </a:r>
+            <a:r>
+              <a:rPr>
+                <a:solidFill>
+                  <a:srgbClr val="657422"/>
+                </a:solidFill>
+                <a:latin typeface="Courier"/>
+              </a:rPr>
+              <a:t>seed =</a:t>
+            </a:r>
+            <a:r>
+              <a:rPr>
+                <a:solidFill>
+                  <a:srgbClr val="003B4F"/>
+                </a:solidFill>
+                <a:latin typeface="Courier"/>
+              </a:rPr>
+              <a:t> </a:t>
+            </a:r>
+            <a:r>
+              <a:rPr>
+                <a:solidFill>
+                  <a:srgbClr val="AD0000"/>
+                </a:solidFill>
+                <a:latin typeface="Courier"/>
+              </a:rPr>
+              <a:t>42</a:t>
+            </a:r>
+            <a:r>
+              <a:rPr>
+                <a:solidFill>
+                  <a:srgbClr val="003B4F"/>
+                </a:solidFill>
+                <a:latin typeface="Courier"/>
+              </a:rPr>
+              <a:t>)</a:t>
+            </a:r>
+            <a:br/>
+            <a:br/>
+            <a:r>
+              <a:rPr>
+                <a:solidFill>
+                  <a:srgbClr val="4758AB"/>
+                </a:solidFill>
+                <a:latin typeface="Courier"/>
+              </a:rPr>
               <a:t>ggplot</a:t>
             </a:r>
             <a:r>
@@ -10037,7 +10148,7 @@
                 </a:solidFill>
                 <a:latin typeface="Courier"/>
               </a:rPr>
-              <a:t>geom_jitter</a:t>
+              <a:t>geom_point</a:t>
             </a:r>
             <a:r>
               <a:rPr>
@@ -10055,7 +10166,25 @@
                 </a:solidFill>
                 <a:latin typeface="Courier"/>
               </a:rPr>
-              <a:t>width =</a:t>
+              <a:t>position =</a:t>
+            </a:r>
+            <a:r>
+              <a:rPr>
+                <a:solidFill>
+                  <a:srgbClr val="003B4F"/>
+                </a:solidFill>
+                <a:latin typeface="Courier"/>
+              </a:rPr>
+              <a:t> jitter_pos, </a:t>
+            </a:r>
+            <a:r>
+              <a:rPr>
+                <a:solidFill>
+                  <a:srgbClr val="657422"/>
+                </a:solidFill>
+                <a:latin typeface="Courier"/>
+              </a:rPr>
+              <a:t>alpha =</a:t>
             </a:r>
             <a:r>
               <a:rPr>
@@ -10073,7 +10202,7 @@
                 </a:solidFill>
                 <a:latin typeface="Courier"/>
               </a:rPr>
-              <a:t>0.15</a:t>
+              <a:t>0.6</a:t>
             </a:r>
             <a:r>
               <a:rPr>
@@ -10091,7 +10220,7 @@
                 </a:solidFill>
                 <a:latin typeface="Courier"/>
               </a:rPr>
-              <a:t>alpha =</a:t>
+              <a:t>color =</a:t>
             </a:r>
             <a:r>
               <a:rPr>
@@ -10105,42 +10234,6 @@
             <a:r>
               <a:rPr>
                 <a:solidFill>
-                  <a:srgbClr val="AD0000"/>
-                </a:solidFill>
-                <a:latin typeface="Courier"/>
-              </a:rPr>
-              <a:t>0.6</a:t>
-            </a:r>
-            <a:r>
-              <a:rPr>
-                <a:solidFill>
-                  <a:srgbClr val="003B4F"/>
-                </a:solidFill>
-                <a:latin typeface="Courier"/>
-              </a:rPr>
-              <a:t>, </a:t>
-            </a:r>
-            <a:r>
-              <a:rPr>
-                <a:solidFill>
-                  <a:srgbClr val="657422"/>
-                </a:solidFill>
-                <a:latin typeface="Courier"/>
-              </a:rPr>
-              <a:t>color =</a:t>
-            </a:r>
-            <a:r>
-              <a:rPr>
-                <a:solidFill>
-                  <a:srgbClr val="003B4F"/>
-                </a:solidFill>
-                <a:latin typeface="Courier"/>
-              </a:rPr>
-              <a:t> </a:t>
-            </a:r>
-            <a:r>
-              <a:rPr>
-                <a:solidFill>
                   <a:srgbClr val="20794D"/>
                 </a:solidFill>
                 <a:latin typeface="Courier"/>
@@ -10164,206 +10257,6 @@
                 <a:latin typeface="Courier"/>
               </a:rPr>
               <a:t>+</a:t>
-            </a:r>
-            <a:br/>
-            <a:r>
-              <a:rPr>
-                <a:solidFill>
-                  <a:srgbClr val="003B4F"/>
-                </a:solidFill>
-                <a:latin typeface="Courier"/>
-              </a:rPr>
-              <a:t>  </a:t>
-            </a:r>
-            <a:r>
-              <a:rPr>
-                <a:solidFill>
-                  <a:srgbClr val="4758AB"/>
-                </a:solidFill>
-                <a:latin typeface="Courier"/>
-              </a:rPr>
-              <a:t>geom_point</a:t>
-            </a:r>
-            <a:r>
-              <a:rPr>
-                <a:solidFill>
-                  <a:srgbClr val="003B4F"/>
-                </a:solidFill>
-                <a:latin typeface="Courier"/>
-              </a:rPr>
-              <a:t>(</a:t>
-            </a:r>
-            <a:r>
-              <a:rPr>
-                <a:solidFill>
-                  <a:srgbClr val="657422"/>
-                </a:solidFill>
-                <a:latin typeface="Courier"/>
-              </a:rPr>
-              <a:t>position =</a:t>
-            </a:r>
-            <a:r>
-              <a:rPr>
-                <a:solidFill>
-                  <a:srgbClr val="003B4F"/>
-                </a:solidFill>
-                <a:latin typeface="Courier"/>
-              </a:rPr>
-              <a:t> </a:t>
-            </a:r>
-            <a:r>
-              <a:rPr>
-                <a:solidFill>
-                  <a:srgbClr val="4758AB"/>
-                </a:solidFill>
-                <a:latin typeface="Courier"/>
-              </a:rPr>
-              <a:t>position_dodge</a:t>
-            </a:r>
-            <a:r>
-              <a:rPr>
-                <a:solidFill>
-                  <a:srgbClr val="003B4F"/>
-                </a:solidFill>
-                <a:latin typeface="Courier"/>
-              </a:rPr>
-              <a:t>(</a:t>
-            </a:r>
-            <a:r>
-              <a:rPr>
-                <a:solidFill>
-                  <a:srgbClr val="657422"/>
-                </a:solidFill>
-                <a:latin typeface="Courier"/>
-              </a:rPr>
-              <a:t>width =</a:t>
-            </a:r>
-            <a:r>
-              <a:rPr>
-                <a:solidFill>
-                  <a:srgbClr val="003B4F"/>
-                </a:solidFill>
-                <a:latin typeface="Courier"/>
-              </a:rPr>
-              <a:t> </a:t>
-            </a:r>
-            <a:r>
-              <a:rPr>
-                <a:solidFill>
-                  <a:srgbClr val="AD0000"/>
-                </a:solidFill>
-                <a:latin typeface="Courier"/>
-              </a:rPr>
-              <a:t>0.15</a:t>
-            </a:r>
-            <a:r>
-              <a:rPr>
-                <a:solidFill>
-                  <a:srgbClr val="003B4F"/>
-                </a:solidFill>
-                <a:latin typeface="Courier"/>
-              </a:rPr>
-              <a:t>, </a:t>
-            </a:r>
-            <a:r>
-              <a:rPr>
-                <a:solidFill>
-                  <a:srgbClr val="657422"/>
-                </a:solidFill>
-                <a:latin typeface="Courier"/>
-              </a:rPr>
-              <a:t>alpha =</a:t>
-            </a:r>
-            <a:r>
-              <a:rPr>
-                <a:solidFill>
-                  <a:srgbClr val="003B4F"/>
-                </a:solidFill>
-                <a:latin typeface="Courier"/>
-              </a:rPr>
-              <a:t> </a:t>
-            </a:r>
-            <a:r>
-              <a:rPr>
-                <a:solidFill>
-                  <a:srgbClr val="AD0000"/>
-                </a:solidFill>
-                <a:latin typeface="Courier"/>
-              </a:rPr>
-              <a:t>0.6</a:t>
-            </a:r>
-            <a:r>
-              <a:rPr>
-                <a:solidFill>
-                  <a:srgbClr val="003B4F"/>
-                </a:solidFill>
-                <a:latin typeface="Courier"/>
-              </a:rPr>
-              <a:t>, </a:t>
-            </a:r>
-            <a:r>
-              <a:rPr>
-                <a:solidFill>
-                  <a:srgbClr val="657422"/>
-                </a:solidFill>
-                <a:latin typeface="Courier"/>
-              </a:rPr>
-              <a:t>color =</a:t>
-            </a:r>
-            <a:r>
-              <a:rPr>
-                <a:solidFill>
-                  <a:srgbClr val="003B4F"/>
-                </a:solidFill>
-                <a:latin typeface="Courier"/>
-              </a:rPr>
-              <a:t> </a:t>
-            </a:r>
-            <a:r>
-              <a:rPr>
-                <a:solidFill>
-                  <a:srgbClr val="20794D"/>
-                </a:solidFill>
-                <a:latin typeface="Courier"/>
-              </a:rPr>
-              <a:t>"tomato"</a:t>
-            </a:r>
-            <a:r>
-              <a:rPr>
-                <a:solidFill>
-                  <a:srgbClr val="003B4F"/>
-                </a:solidFill>
-                <a:latin typeface="Courier"/>
-              </a:rPr>
-              <a:t>)) </a:t>
-            </a:r>
-            <a:r>
-              <a:rPr>
-                <a:solidFill>
-                  <a:srgbClr val="5E5E5E"/>
-                </a:solidFill>
-                <a:latin typeface="Courier"/>
-              </a:rPr>
-              <a:t>+</a:t>
-            </a:r>
-            <a:r>
-              <a:rPr>
-                <a:solidFill>
-                  <a:srgbClr val="003B4F"/>
-                </a:solidFill>
-                <a:latin typeface="Courier"/>
-              </a:rPr>
-              <a:t> </a:t>
-            </a:r>
-            <a:br/>
-            <a:r>
-              <a:rPr>
-                <a:solidFill>
-                  <a:srgbClr val="5E5E5E"/>
-                </a:solidFill>
-                <a:latin typeface="Courier"/>
-              </a:rPr>
-              <a:t># the two above are about the same but I prefer the lower one for a few reasons....</a:t>
             </a:r>
             <a:br/>
             <a:r>
@@ -10616,6 +10509,87 @@
             <a:r>
               <a:rPr/>
               <a:t> sketch what you expect this plot to look like — boxes, dots, axes — then compare it to what R draws.</a:t>
+            </a:r>
+          </a:p>
+          <a:p>
+            <a:pPr lvl="0" indent="0" marL="1270000">
+              <a:buNone/>
+            </a:pPr>
+            <a:r>
+              <a:rPr sz="2000" b="1"/>
+              <a:t>Note</a:t>
+            </a:r>
+          </a:p>
+          <a:p>
+            <a:pPr lvl="0" indent="0" marL="1270000">
+              <a:buNone/>
+            </a:pPr>
+            <a:r>
+              <a:rPr sz="2000" b="1"/>
+              <a:t>Why </a:t>
+            </a:r>
+            <a:r>
+              <a:rPr sz="2000" b="1">
+                <a:latin typeface="Courier"/>
+              </a:rPr>
+              <a:t>position_jitter()</a:t>
+            </a:r>
+            <a:r>
+              <a:rPr sz="2000" b="1"/>
+              <a:t> in a variable?</a:t>
+            </a:r>
+          </a:p>
+          <a:p>
+            <a:pPr lvl="0" indent="0" marL="1270000">
+              <a:buNone/>
+            </a:pPr>
+            <a:r>
+              <a:rPr sz="2000">
+                <a:latin typeface="Courier"/>
+              </a:rPr>
+              <a:t>geom_point()</a:t>
+            </a:r>
+            <a:r>
+              <a:rPr sz="2000"/>
+              <a:t> alone stacks every leaf on one vertical line. </a:t>
+            </a:r>
+            <a:r>
+              <a:rPr sz="2000">
+                <a:latin typeface="Courier"/>
+              </a:rPr>
+              <a:t>position_jitter(width = 0.15)</a:t>
+            </a:r>
+            <a:r>
+              <a:rPr sz="2000"/>
+              <a:t> nudges them sideways so you can see each one; </a:t>
+            </a:r>
+            <a:r>
+              <a:rPr sz="2000">
+                <a:latin typeface="Courier"/>
+              </a:rPr>
+              <a:t>seed = 42</a:t>
+            </a:r>
+            <a:r>
+              <a:rPr sz="2000"/>
+              <a:t> keeps that random nudge identical every time you render. Storing it in </a:t>
+            </a:r>
+            <a:r>
+              <a:rPr sz="2000">
+                <a:latin typeface="Courier"/>
+              </a:rPr>
+              <a:t>jitter_pos</a:t>
+            </a:r>
+            <a:r>
+              <a:rPr sz="2000"/>
+              <a:t> means the </a:t>
+            </a:r>
+            <a:r>
+              <a:rPr sz="2000" i="1"/>
+              <a:t>next</a:t>
+            </a:r>
+            <a:r>
+              <a:rPr sz="2000"/>
+              <a:t> layer (a mean, an error bar, a connecting line) can sit at the exact same spot.</a:t>
             </a:r>
           </a:p>
         </p:txBody>

--- a/docs/content/meeting_r/meeting_r_lecture.pptx
+++ b/docs/content/meeting_r/meeting_r_lecture.pptx
@@ -3370,7 +3370,7 @@
             </a:pPr>
             <a:r>
               <a:rPr/>
-              <a:t>2026-09-10</a:t>
+              <a:t>2026-09-14</a:t>
             </a:r>
           </a:p>
         </p:txBody>
@@ -9905,11 +9905,83 @@
             <a:r>
               <a:rPr>
                 <a:solidFill>
+                  <a:srgbClr val="4758AB"/>
+                </a:solidFill>
+                <a:latin typeface="Courier"/>
+              </a:rPr>
+              <a:t>ggplot</a:t>
+            </a:r>
+            <a:r>
+              <a:rPr>
+                <a:solidFill>
+                  <a:srgbClr val="003B4F"/>
+                </a:solidFill>
+                <a:latin typeface="Courier"/>
+              </a:rPr>
+              <a:t>(tree_df, </a:t>
+            </a:r>
+            <a:r>
+              <a:rPr>
+                <a:solidFill>
+                  <a:srgbClr val="4758AB"/>
+                </a:solidFill>
+                <a:latin typeface="Courier"/>
+              </a:rPr>
+              <a:t>aes</a:t>
+            </a:r>
+            <a:r>
+              <a:rPr>
+                <a:solidFill>
+                  <a:srgbClr val="003B4F"/>
+                </a:solidFill>
+                <a:latin typeface="Courier"/>
+              </a:rPr>
+              <a:t>(</a:t>
+            </a:r>
+            <a:r>
+              <a:rPr>
+                <a:solidFill>
+                  <a:srgbClr val="657422"/>
+                </a:solidFill>
+                <a:latin typeface="Courier"/>
+              </a:rPr>
+              <a:t>x =</a:t>
+            </a:r>
+            <a:r>
+              <a:rPr>
+                <a:solidFill>
+                  <a:srgbClr val="003B4F"/>
+                </a:solidFill>
+                <a:latin typeface="Courier"/>
+              </a:rPr>
+              <a:t> shade, </a:t>
+            </a:r>
+            <a:r>
+              <a:rPr>
+                <a:solidFill>
+                  <a:srgbClr val="657422"/>
+                </a:solidFill>
+                <a:latin typeface="Courier"/>
+              </a:rPr>
+              <a:t>y =</a:t>
+            </a:r>
+            <a:r>
+              <a:rPr>
+                <a:solidFill>
+                  <a:srgbClr val="003B4F"/>
+                </a:solidFill>
+                <a:latin typeface="Courier"/>
+              </a:rPr>
+              <a:t> mass_g)) </a:t>
+            </a:r>
+            <a:r>
+              <a:rPr>
+                <a:solidFill>
                   <a:srgbClr val="5E5E5E"/>
                 </a:solidFill>
                 <a:latin typeface="Courier"/>
               </a:rPr>
-              <a:t># define the point position ONCE, at the top, so every layer can reuse it</a:t>
+              <a:t>+</a:t>
             </a:r>
             <a:br/>
             <a:r>
@@ -9919,7 +9991,7 @@
                 </a:solidFill>
                 <a:latin typeface="Courier"/>
               </a:rPr>
-              <a:t>jitter_pos &lt;- </a:t>
+              <a:t>  </a:t>
             </a:r>
             <a:r>
               <a:rPr>
@@ -9928,7 +10000,44 @@
                 </a:solidFill>
                 <a:latin typeface="Courier"/>
               </a:rPr>
-              <a:t>position_jitter</a:t>
+              <a:t>geom_boxplot</a:t>
+            </a:r>
+            <a:r>
+              <a:rPr>
+                <a:solidFill>
+                  <a:srgbClr val="003B4F"/>
+                </a:solidFill>
+                <a:latin typeface="Courier"/>
+              </a:rPr>
+              <a:t>() </a:t>
+            </a:r>
+            <a:r>
+              <a:rPr>
+                <a:solidFill>
+                  <a:srgbClr val="5E5E5E"/>
+                </a:solidFill>
+                <a:latin typeface="Courier"/>
+              </a:rPr>
+              <a:t>+</a:t>
+            </a:r>
+            <a:br/>
+            <a:r>
+              <a:rPr>
+                <a:solidFill>
+                  <a:srgbClr val="003B4F"/>
+                </a:solidFill>
+                <a:latin typeface="Courier"/>
+              </a:rPr>
+              <a:t>  </a:t>
+            </a:r>
+            <a:r>
+              <a:rPr>
+                <a:solidFill>
+                  <a:srgbClr val="4758AB"/>
+                </a:solidFill>
+                <a:latin typeface="Courier"/>
+              </a:rPr>
+              <a:t>geom_jitter</a:t>
             </a:r>
             <a:r>
               <a:rPr>
@@ -9974,208 +10083,6 @@
                 <a:latin typeface="Courier"/>
               </a:rPr>
               <a:t>, </a:t>
-            </a:r>
-            <a:r>
-              <a:rPr>
-                <a:solidFill>
-                  <a:srgbClr val="657422"/>
-                </a:solidFill>
-                <a:latin typeface="Courier"/>
-              </a:rPr>
-              <a:t>seed =</a:t>
-            </a:r>
-            <a:r>
-              <a:rPr>
-                <a:solidFill>
-                  <a:srgbClr val="003B4F"/>
-                </a:solidFill>
-                <a:latin typeface="Courier"/>
-              </a:rPr>
-              <a:t> </a:t>
-            </a:r>
-            <a:r>
-              <a:rPr>
-                <a:solidFill>
-                  <a:srgbClr val="AD0000"/>
-                </a:solidFill>
-                <a:latin typeface="Courier"/>
-              </a:rPr>
-              <a:t>42</a:t>
-            </a:r>
-            <a:r>
-              <a:rPr>
-                <a:solidFill>
-                  <a:srgbClr val="003B4F"/>
-                </a:solidFill>
-                <a:latin typeface="Courier"/>
-              </a:rPr>
-              <a:t>)</a:t>
-            </a:r>
-            <a:br/>
-            <a:br/>
-            <a:r>
-              <a:rPr>
-                <a:solidFill>
-                  <a:srgbClr val="4758AB"/>
-                </a:solidFill>
-                <a:latin typeface="Courier"/>
-              </a:rPr>
-              <a:t>ggplot</a:t>
-            </a:r>
-            <a:r>
-              <a:rPr>
-                <a:solidFill>
-                  <a:srgbClr val="003B4F"/>
-                </a:solidFill>
-                <a:latin typeface="Courier"/>
-              </a:rPr>
-              <a:t>(tree_df, </a:t>
-            </a:r>
-            <a:r>
-              <a:rPr>
-                <a:solidFill>
-                  <a:srgbClr val="4758AB"/>
-                </a:solidFill>
-                <a:latin typeface="Courier"/>
-              </a:rPr>
-              <a:t>aes</a:t>
-            </a:r>
-            <a:r>
-              <a:rPr>
-                <a:solidFill>
-                  <a:srgbClr val="003B4F"/>
-                </a:solidFill>
-                <a:latin typeface="Courier"/>
-              </a:rPr>
-              <a:t>(</a:t>
-            </a:r>
-            <a:r>
-              <a:rPr>
-                <a:solidFill>
-                  <a:srgbClr val="657422"/>
-                </a:solidFill>
-                <a:latin typeface="Courier"/>
-              </a:rPr>
-              <a:t>x =</a:t>
-            </a:r>
-            <a:r>
-              <a:rPr>
-                <a:solidFill>
-                  <a:srgbClr val="003B4F"/>
-                </a:solidFill>
-                <a:latin typeface="Courier"/>
-              </a:rPr>
-              <a:t> shade, </a:t>
-            </a:r>
-            <a:r>
-              <a:rPr>
-                <a:solidFill>
-                  <a:srgbClr val="657422"/>
-                </a:solidFill>
-                <a:latin typeface="Courier"/>
-              </a:rPr>
-              <a:t>y =</a:t>
-            </a:r>
-            <a:r>
-              <a:rPr>
-                <a:solidFill>
-                  <a:srgbClr val="003B4F"/>
-                </a:solidFill>
-                <a:latin typeface="Courier"/>
-              </a:rPr>
-              <a:t> mass_g)) </a:t>
-            </a:r>
-            <a:r>
-              <a:rPr>
-                <a:solidFill>
-                  <a:srgbClr val="5E5E5E"/>
-                </a:solidFill>
-                <a:latin typeface="Courier"/>
-              </a:rPr>
-              <a:t>+</a:t>
-            </a:r>
-            <a:br/>
-            <a:r>
-              <a:rPr>
-                <a:solidFill>
-                  <a:srgbClr val="003B4F"/>
-                </a:solidFill>
-                <a:latin typeface="Courier"/>
-              </a:rPr>
-              <a:t>  </a:t>
-            </a:r>
-            <a:r>
-              <a:rPr>
-                <a:solidFill>
-                  <a:srgbClr val="4758AB"/>
-                </a:solidFill>
-                <a:latin typeface="Courier"/>
-              </a:rPr>
-              <a:t>geom_boxplot</a:t>
-            </a:r>
-            <a:r>
-              <a:rPr>
-                <a:solidFill>
-                  <a:srgbClr val="003B4F"/>
-                </a:solidFill>
-                <a:latin typeface="Courier"/>
-              </a:rPr>
-              <a:t>() </a:t>
-            </a:r>
-            <a:r>
-              <a:rPr>
-                <a:solidFill>
-                  <a:srgbClr val="5E5E5E"/>
-                </a:solidFill>
-                <a:latin typeface="Courier"/>
-              </a:rPr>
-              <a:t>+</a:t>
-            </a:r>
-            <a:br/>
-            <a:r>
-              <a:rPr>
-                <a:solidFill>
-                  <a:srgbClr val="003B4F"/>
-                </a:solidFill>
-                <a:latin typeface="Courier"/>
-              </a:rPr>
-              <a:t>  </a:t>
-            </a:r>
-            <a:r>
-              <a:rPr>
-                <a:solidFill>
-                  <a:srgbClr val="4758AB"/>
-                </a:solidFill>
-                <a:latin typeface="Courier"/>
-              </a:rPr>
-              <a:t>geom_point</a:t>
-            </a:r>
-            <a:r>
-              <a:rPr>
-                <a:solidFill>
-                  <a:srgbClr val="003B4F"/>
-                </a:solidFill>
-                <a:latin typeface="Courier"/>
-              </a:rPr>
-              <a:t>(</a:t>
-            </a:r>
-            <a:r>
-              <a:rPr>
-                <a:solidFill>
-                  <a:srgbClr val="657422"/>
-                </a:solidFill>
-                <a:latin typeface="Courier"/>
-              </a:rPr>
-              <a:t>position =</a:t>
-            </a:r>
-            <a:r>
-              <a:rPr>
-                <a:solidFill>
-                  <a:srgbClr val="003B4F"/>
-                </a:solidFill>
-                <a:latin typeface="Courier"/>
-              </a:rPr>
-              <a:t> jitter_pos, </a:t>
             </a:r>
             <a:r>
               <a:rPr>
@@ -10512,84 +10419,38 @@
             </a:r>
           </a:p>
           <a:p>
-            <a:pPr lvl="0" indent="0" marL="1270000">
-              <a:buNone/>
-            </a:pPr>
-            <a:r>
-              <a:rPr sz="2000" b="1"/>
-              <a:t>Note</a:t>
-            </a:r>
-          </a:p>
-          <a:p>
-            <a:pPr lvl="0" indent="0" marL="1270000">
-              <a:buNone/>
-            </a:pPr>
-            <a:r>
-              <a:rPr sz="2000" b="1"/>
-              <a:t>Why </a:t>
-            </a:r>
-            <a:r>
-              <a:rPr sz="2000" b="1">
-                <a:latin typeface="Courier"/>
-              </a:rPr>
-              <a:t>position_jitter()</a:t>
-            </a:r>
-            <a:r>
-              <a:rPr sz="2000" b="1"/>
-              <a:t> in a variable?</a:t>
-            </a:r>
-          </a:p>
-          <a:p>
-            <a:pPr lvl="0" indent="0" marL="1270000">
-              <a:buNone/>
-            </a:pPr>
-            <a:r>
-              <a:rPr sz="2000">
+            <a:pPr lvl="0" indent="0" marL="0">
+              <a:buNone/>
+            </a:pPr>
+            <a:r>
+              <a:rPr>
+                <a:latin typeface="Courier"/>
+              </a:rPr>
+              <a:t>geom_jitter()</a:t>
+            </a:r>
+            <a:r>
+              <a:rPr/>
+              <a:t> is just </a:t>
+            </a:r>
+            <a:r>
+              <a:rPr>
                 <a:latin typeface="Courier"/>
               </a:rPr>
               <a:t>geom_point()</a:t>
             </a:r>
             <a:r>
-              <a:rPr sz="2000"/>
-              <a:t> alone stacks every leaf on one vertical line. </a:t>
-            </a:r>
-            <a:r>
-              <a:rPr sz="2000">
-                <a:latin typeface="Courier"/>
-              </a:rPr>
-              <a:t>position_jitter(width = 0.15)</a:t>
-            </a:r>
-            <a:r>
-              <a:rPr sz="2000"/>
-              <a:t> nudges them sideways so you can see each one; </a:t>
-            </a:r>
-            <a:r>
-              <a:rPr sz="2000">
-                <a:latin typeface="Courier"/>
-              </a:rPr>
-              <a:t>seed = 42</a:t>
-            </a:r>
-            <a:r>
-              <a:rPr sz="2000"/>
-              <a:t> keeps that random nudge identical every time you render. Storing it in </a:t>
-            </a:r>
-            <a:r>
-              <a:rPr sz="2000">
-                <a:latin typeface="Courier"/>
-              </a:rPr>
-              <a:t>jitter_pos</a:t>
-            </a:r>
-            <a:r>
-              <a:rPr sz="2000"/>
-              <a:t> means the </a:t>
-            </a:r>
-            <a:r>
-              <a:rPr sz="2000" i="1"/>
-              <a:t>next</a:t>
-            </a:r>
-            <a:r>
-              <a:rPr sz="2000"/>
-              <a:t> layer (a mean, an error bar, a connecting line) can sit at the exact same spot.</a:t>
+              <a:rPr/>
+              <a:t> with a small sideways nudge (</a:t>
+            </a:r>
+            <a:r>
+              <a:rPr>
+                <a:latin typeface="Courier"/>
+              </a:rPr>
+              <a:t>width = 0.15</a:t>
+            </a:r>
+            <a:r>
+              <a:rPr/>
+              <a:t>) so overlapping leaves don’t hide behind each other.</a:t>
             </a:r>
           </a:p>
         </p:txBody>
@@ -12852,7 +12713,7 @@
               <a:rPr>
                 <a:latin typeface="Courier"/>
               </a:rPr>
-              <a:t>tree_project/
+              <a:t>leaf_project/
 ├── data/          ← your Excel and CSV files
 ├── scripts/       ← your .R code files
 └── figures/       ← plots you save</a:t>

--- a/docs/content/meeting_r/meeting_r_lecture.pptx
+++ b/docs/content/meeting_r/meeting_r_lecture.pptx
@@ -3370,7 +3370,7 @@
             </a:pPr>
             <a:r>
               <a:rPr/>
-              <a:t>2026-09-14</a:t>
+              <a:t>2026-09-21</a:t>
             </a:r>
           </a:p>
         </p:txBody>

--- a/docs/content/meeting_r/meeting_r_lecture.pptx
+++ b/docs/content/meeting_r/meeting_r_lecture.pptx
@@ -3370,7 +3370,7 @@
             </a:pPr>
             <a:r>
               <a:rPr/>
-              <a:t>2026-09-21</a:t>
+              <a:t>2026-09-22</a:t>
             </a:r>
           </a:p>
         </p:txBody>

--- a/docs/content/meeting_r/meeting_r_lecture.pptx
+++ b/docs/content/meeting_r/meeting_r_lecture.pptx
@@ -3370,7 +3370,7 @@
             </a:pPr>
             <a:r>
               <a:rPr/>
-              <a:t>2026-09-22</a:t>
+              <a:t>2026-09-23</a:t>
             </a:r>
           </a:p>
         </p:txBody>

--- a/docs/content/meeting_r/meeting_r_lecture.pptx
+++ b/docs/content/meeting_r/meeting_r_lecture.pptx
@@ -7520,7 +7520,17 @@
                 </a:solidFill>
                 <a:latin typeface="Courier"/>
               </a:rPr>
-              <a:t>tree_df &lt;- </a:t>
+              <a:t>tree_df &lt;-</a:t>
+            </a:r>
+            <a:br/>
+            <a:r>
+              <a:rPr>
+                <a:solidFill>
+                  <a:srgbClr val="003B4F"/>
+                </a:solidFill>
+                <a:latin typeface="Courier"/>
+              </a:rPr>
+              <a:t>  </a:t>
             </a:r>
             <a:r>
               <a:rPr>
@@ -8539,7 +8549,26 @@
                 </a:solidFill>
                 <a:latin typeface="Courier"/>
               </a:rPr>
-              <a:t># one line per column: name, type, first values</a:t>
+              <a:t># one line per column:</a:t>
+            </a:r>
+            <a:br/>
+            <a:r>
+              <a:rPr>
+                <a:solidFill>
+                  <a:srgbClr val="003B4F"/>
+                </a:solidFill>
+                <a:latin typeface="Courier"/>
+              </a:rPr>
+              <a:t>                   </a:t>
+            </a:r>
+            <a:r>
+              <a:rPr>
+                <a:solidFill>
+                  <a:srgbClr val="5E5E5E"/>
+                </a:solidFill>
+                <a:latin typeface="Courier"/>
+              </a:rPr>
+              <a:t># name, type, first values</a:t>
             </a:r>
             <a:br/>
             <a:br/>

--- a/docs/content/meeting_r/meeting_r_lecture.pptx
+++ b/docs/content/meeting_r/meeting_r_lecture.pptx
@@ -3370,7 +3370,7 @@
             </a:pPr>
             <a:r>
               <a:rPr/>
-              <a:t>2026-09-23</a:t>
+              <a:t>2026-09-24</a:t>
             </a:r>
           </a:p>
         </p:txBody>

--- a/docs/content/meeting_r/meeting_r_lecture.pptx
+++ b/docs/content/meeting_r/meeting_r_lecture.pptx
@@ -3370,7 +3370,7 @@
             </a:pPr>
             <a:r>
               <a:rPr/>
-              <a:t>2026-09-24</a:t>
+              <a:t>2026-09-29</a:t>
             </a:r>
           </a:p>
         </p:txBody>

--- a/docs/content/meeting_r/meeting_r_lecture.pptx
+++ b/docs/content/meeting_r/meeting_r_lecture.pptx
@@ -3370,7 +3370,7 @@
             </a:pPr>
             <a:r>
               <a:rPr/>
-              <a:t>2026-09-29</a:t>
+              <a:t>2026-10-01</a:t>
             </a:r>
           </a:p>
         </p:txBody>

--- a/docs/content/meeting_r/meeting_r_lecture.pptx
+++ b/docs/content/meeting_r/meeting_r_lecture.pptx
@@ -3370,7 +3370,7 @@
             </a:pPr>
             <a:r>
               <a:rPr/>
-              <a:t>2026-10-01</a:t>
+              <a:t>2026-10-05</a:t>
             </a:r>
           </a:p>
         </p:txBody>
@@ -3699,8 +3699,8 @@
         </p:blipFill>
         <p:spPr bwMode="auto">
           <a:xfrm>
-            <a:off x="4660900" y="660400"/>
-            <a:ext cx="4089400" cy="3302000"/>
+            <a:off x="4495800" y="787400"/>
+            <a:ext cx="4406900" cy="3556000"/>
           </a:xfrm>
           <a:prstGeom prst="rect">
             <a:avLst/>
@@ -3713,38 +3713,6 @@
           </a:ln>
         </p:spPr>
       </p:pic>
-      <p:sp>
-        <p:nvSpPr>
-          <p:cNvPr id="1" name="TextBox 3"/>
-          <p:cNvSpPr txBox="1"/>
-          <p:nvPr>
-            <p:ph idx="1"/>
-          </p:nvPr>
-        </p:nvSpPr>
-        <p:spPr>
-          <a:xfrm>
-            <a:off x="4495800" y="3962400"/>
-            <a:ext cx="4406900" cy="508000"/>
-          </a:xfrm>
-          <a:prstGeom prst="rect">
-            <a:avLst/>
-          </a:prstGeom>
-          <a:noFill/>
-        </p:spPr>
-        <p:txBody>
-          <a:bodyPr/>
-          <a:lstStyle/>
-          <a:p>
-            <a:pPr lvl="0" indent="0" marL="0" algn="ctr">
-              <a:buNone/>
-            </a:pPr>
-            <a:r>
-              <a:rPr/>
-              <a:t>Diagram of the assignment operator: an arrow from a value (7) on the right pointing left into a name (x), with the environment then showing x storing 7.</a:t>
-            </a:r>
-          </a:p>
-        </p:txBody>
-      </p:sp>
     </p:spTree>
   </p:cSld>
 </p:sld>
@@ -4304,7 +4272,7 @@
             </a:r>
             <a:r>
               <a:rPr sz="2000"/>
-              <a:t> are two </a:t>
+              <a:t> are </a:t>
             </a:r>
             <a:r>
               <a:rPr sz="2000" i="1"/>
@@ -4312,7 +4280,7 @@
             </a:r>
             <a:r>
               <a:rPr sz="2000"/>
-              <a:t> objects. Pick one style and stick with it. I </a:t>
+              <a:t> objects. I </a:t>
             </a:r>
             <a:r>
               <a:rPr sz="2000" b="1"/>
@@ -4458,7 +4426,7 @@
             </a:pPr>
             <a:r>
               <a:rPr sz="2000"/>
-              <a:t>R for Data Science (2e), Ch. 2 — </a:t>
+              <a:t>R for Data Science (2e), Ch. 2 </a:t>
             </a:r>
             <a:r>
               <a:rPr sz="2000" i="1"/>
@@ -4466,7 +4434,7 @@
             </a:r>
             <a:r>
               <a:rPr sz="2000"/>
-              <a:t> (naming, calling functions) and Ch. 4 — </a:t>
+              <a:t> and Ch. 4 </a:t>
             </a:r>
             <a:r>
               <a:rPr sz="2000" i="1"/>
@@ -4474,7 +4442,7 @@
             </a:r>
             <a:r>
               <a:rPr sz="2000"/>
-              <a:t> (spacing, pipes). Short chapters — worth reading both.</a:t>
+              <a:t>. Short — read both.</a:t>
             </a:r>
           </a:p>
         </p:txBody>
@@ -4853,8 +4821,11 @@
         <p:spPr>
           <a:xfrm>
             <a:off x="0" y="0"/>
-            <a:ext cx="9144000" cy="582780"/>
+            <a:ext cx="9144000" cy="602780"/>
           </a:xfrm>
+          <a:solidFill>
+            <a:srgbClr val="1A1A2E"/>
+          </a:solidFill>
         </p:spPr>
         <p:txBody>
           <a:bodyPr/>
@@ -4877,7 +4848,7 @@
             <a:spLocks noGrp="1"/>
           </p:cNvSpPr>
           <p:nvPr>
-            <p:ph idx="1"/>
+            <p:ph idx="1" sz="half"/>
           </p:nvPr>
         </p:nvSpPr>
         <p:spPr/>
@@ -5280,6 +5251,36 @@
           </a:p>
         </p:txBody>
       </p:sp>
+      <p:pic>
+        <p:nvPicPr>
+          <p:cNvPr descr="images/diagram_function.png" id="0" name="Picture 1"/>
+          <p:cNvPicPr>
+            <a:picLocks noGrp="1" noChangeAspect="1"/>
+          </p:cNvPicPr>
+          <p:nvPr/>
+        </p:nvPicPr>
+        <p:blipFill>
+          <a:blip r:embed="rId2"/>
+          <a:stretch>
+            <a:fillRect/>
+          </a:stretch>
+        </p:blipFill>
+        <p:spPr bwMode="auto">
+          <a:xfrm>
+            <a:off x="4495800" y="863600"/>
+            <a:ext cx="4406900" cy="3390900"/>
+          </a:xfrm>
+          <a:prstGeom prst="rect">
+            <a:avLst/>
+          </a:prstGeom>
+          <a:noFill/>
+          <a:ln w="9525">
+            <a:noFill/>
+            <a:headEnd/>
+            <a:tailEnd/>
+          </a:ln>
+        </p:spPr>
+      </p:pic>
     </p:spTree>
   </p:cSld>
 </p:sld>
@@ -6309,8 +6310,8 @@
         </p:blipFill>
         <p:spPr bwMode="auto">
           <a:xfrm>
-            <a:off x="4660900" y="660400"/>
-            <a:ext cx="4089400" cy="3302000"/>
+            <a:off x="4495800" y="787400"/>
+            <a:ext cx="4406900" cy="3556000"/>
           </a:xfrm>
           <a:prstGeom prst="rect">
             <a:avLst/>
@@ -6323,38 +6324,6 @@
           </a:ln>
         </p:spPr>
       </p:pic>
-      <p:sp>
-        <p:nvSpPr>
-          <p:cNvPr id="1" name="TextBox 3"/>
-          <p:cNvSpPr txBox="1"/>
-          <p:nvPr>
-            <p:ph idx="1"/>
-          </p:nvPr>
-        </p:nvSpPr>
-        <p:spPr>
-          <a:xfrm>
-            <a:off x="4495800" y="3962400"/>
-            <a:ext cx="4406900" cy="508000"/>
-          </a:xfrm>
-          <a:prstGeom prst="rect">
-            <a:avLst/>
-          </a:prstGeom>
-          <a:noFill/>
-        </p:spPr>
-        <p:txBody>
-          <a:bodyPr/>
-          <a:lstStyle/>
-          <a:p>
-            <a:pPr lvl="0" indent="0" marL="0" algn="ctr">
-              <a:buNone/>
-            </a:pPr>
-            <a:r>
-              <a:rPr/>
-              <a:t>Diagram of R data types: a vector mixing numbers and a string all coercing to character, and a coercion ladder from logical up through integer, numeric, to character.</a:t>
-            </a:r>
-          </a:p>
-        </p:txBody>
-      </p:sp>
     </p:spTree>
   </p:cSld>
 </p:sld>
@@ -6663,8 +6632,8 @@
         </p:blipFill>
         <p:spPr bwMode="auto">
           <a:xfrm>
-            <a:off x="4584700" y="660400"/>
-            <a:ext cx="4229100" cy="3302000"/>
+            <a:off x="4495800" y="838200"/>
+            <a:ext cx="4406900" cy="3441700"/>
           </a:xfrm>
           <a:prstGeom prst="rect">
             <a:avLst/>
@@ -6677,38 +6646,6 @@
           </a:ln>
         </p:spPr>
       </p:pic>
-      <p:sp>
-        <p:nvSpPr>
-          <p:cNvPr id="1" name="TextBox 3"/>
-          <p:cNvSpPr txBox="1"/>
-          <p:nvPr>
-            <p:ph idx="1"/>
-          </p:nvPr>
-        </p:nvSpPr>
-        <p:spPr>
-          <a:xfrm>
-            <a:off x="4495800" y="3962400"/>
-            <a:ext cx="4406900" cy="508000"/>
-          </a:xfrm>
-          <a:prstGeom prst="rect">
-            <a:avLst/>
-          </a:prstGeom>
-          <a:noFill/>
-        </p:spPr>
-        <p:txBody>
-          <a:bodyPr/>
-          <a:lstStyle/>
-          <a:p>
-            <a:pPr lvl="0" indent="0" marL="0" algn="ctr">
-              <a:buNone/>
-            </a:pPr>
-            <a:r>
-              <a:rPr/>
-              <a:t>Screenshot of the Positron editor pane with a script file open above the Terminal, and the Explorer, Variables, and Plots panes visible.</a:t>
-            </a:r>
-          </a:p>
-        </p:txBody>
-      </p:sp>
     </p:spTree>
   </p:cSld>
 </p:sld>
@@ -8273,8 +8210,8 @@
         </p:blipFill>
         <p:spPr bwMode="auto">
           <a:xfrm>
-            <a:off x="4660900" y="660400"/>
-            <a:ext cx="4089400" cy="3302000"/>
+            <a:off x="4495800" y="787400"/>
+            <a:ext cx="4406900" cy="3556000"/>
           </a:xfrm>
           <a:prstGeom prst="rect">
             <a:avLst/>
@@ -8287,38 +8224,6 @@
           </a:ln>
         </p:spPr>
       </p:pic>
-      <p:sp>
-        <p:nvSpPr>
-          <p:cNvPr id="1" name="TextBox 3"/>
-          <p:cNvSpPr txBox="1"/>
-          <p:nvPr>
-            <p:ph idx="1"/>
-          </p:nvPr>
-        </p:nvSpPr>
-        <p:spPr>
-          <a:xfrm>
-            <a:off x="4495800" y="3962400"/>
-            <a:ext cx="4406900" cy="508000"/>
-          </a:xfrm>
-          <a:prstGeom prst="rect">
-            <a:avLst/>
-          </a:prstGeom>
-          <a:noFill/>
-        </p:spPr>
-        <p:txBody>
-          <a:bodyPr/>
-          <a:lstStyle/>
-          <a:p>
-            <a:pPr lvl="0" indent="0" marL="0" algn="ctr">
-              <a:buNone/>
-            </a:pPr>
-            <a:r>
-              <a:rPr/>
-              <a:t>Diagram of a data frame as columns of vectors: a shade column (character), mass_g column (numeric), and petiole_mm column (numeric), with rows lining up across columns.</a:t>
-            </a:r>
-          </a:p>
-        </p:txBody>
-      </p:sp>
     </p:spTree>
   </p:cSld>
 </p:sld>
@@ -8930,7 +8835,7 @@
                 </a:solidFill>
                 <a:latin typeface="Courier"/>
               </a:rPr>
-              <a:t>()         </a:t>
+              <a:t>()     </a:t>
             </a:r>
             <a:r>
               <a:rPr>
@@ -8985,7 +8890,7 @@
                 </a:solidFill>
                 <a:latin typeface="Courier"/>
               </a:rPr>
-              <a:t>()        </a:t>
+              <a:t>()    </a:t>
             </a:r>
             <a:r>
               <a:rPr>
@@ -8994,7 +8899,7 @@
                 </a:solidFill>
                 <a:latin typeface="Courier"/>
               </a:rPr>
-              <a:t># take tree_df, THEN list column names</a:t>
+              <a:t># take tree_df, THEN list columns</a:t>
             </a:r>
             <a:br/>
             <a:r>
@@ -9031,16 +8936,34 @@
                 </a:solidFill>
                 <a:latin typeface="Courier"/>
               </a:rPr>
-              <a:t>summary</a:t>
-            </a:r>
-            <a:r>
-              <a:rPr>
-                <a:solidFill>
-                  <a:srgbClr val="003B4F"/>
-                </a:solidFill>
-                <a:latin typeface="Courier"/>
-              </a:rPr>
-              <a:t>()      </a:t>
+              <a:t>head</a:t>
+            </a:r>
+            <a:r>
+              <a:rPr>
+                <a:solidFill>
+                  <a:srgbClr val="003B4F"/>
+                </a:solidFill>
+                <a:latin typeface="Courier"/>
+              </a:rPr>
+              <a:t>(</a:t>
+            </a:r>
+            <a:r>
+              <a:rPr>
+                <a:solidFill>
+                  <a:srgbClr val="AD0000"/>
+                </a:solidFill>
+                <a:latin typeface="Courier"/>
+              </a:rPr>
+              <a:t>3</a:t>
+            </a:r>
+            <a:r>
+              <a:rPr>
+                <a:solidFill>
+                  <a:srgbClr val="003B4F"/>
+                </a:solidFill>
+                <a:latin typeface="Courier"/>
+              </a:rPr>
+              <a:t>)    </a:t>
             </a:r>
             <a:r>
               <a:rPr>
@@ -9049,101 +8972,7 @@
                 </a:solidFill>
                 <a:latin typeface="Courier"/>
               </a:rPr>
-              <a:t># take tree_df, THEN summarize</a:t>
-            </a:r>
-            <a:br/>
-            <a:br/>
-            <a:r>
-              <a:rPr>
-                <a:solidFill>
-                  <a:srgbClr val="5E5E5E"/>
-                </a:solidFill>
-                <a:latin typeface="Courier"/>
-              </a:rPr>
-              <a:t># Chain two steps:</a:t>
-            </a:r>
-            <a:br/>
-            <a:r>
-              <a:rPr>
-                <a:solidFill>
-                  <a:srgbClr val="003B4F"/>
-                </a:solidFill>
-                <a:latin typeface="Courier"/>
-              </a:rPr>
-              <a:t>tree_df </a:t>
-            </a:r>
-            <a:r>
-              <a:rPr>
-                <a:solidFill>
-                  <a:srgbClr val="5E5E5E"/>
-                </a:solidFill>
-                <a:latin typeface="Courier"/>
-              </a:rPr>
-              <a:t>%&gt;%</a:t>
-            </a:r>
-            <a:br/>
-            <a:r>
-              <a:rPr>
-                <a:solidFill>
-                  <a:srgbClr val="003B4F"/>
-                </a:solidFill>
-                <a:latin typeface="Courier"/>
-              </a:rPr>
-              <a:t>  </a:t>
-            </a:r>
-            <a:r>
-              <a:rPr>
-                <a:solidFill>
-                  <a:srgbClr val="4758AB"/>
-                </a:solidFill>
-                <a:latin typeface="Courier"/>
-              </a:rPr>
-              <a:t>head</a:t>
-            </a:r>
-            <a:r>
-              <a:rPr>
-                <a:solidFill>
-                  <a:srgbClr val="003B4F"/>
-                </a:solidFill>
-                <a:latin typeface="Courier"/>
-              </a:rPr>
-              <a:t>(</a:t>
-            </a:r>
-            <a:r>
-              <a:rPr>
-                <a:solidFill>
-                  <a:srgbClr val="AD0000"/>
-                </a:solidFill>
-                <a:latin typeface="Courier"/>
-              </a:rPr>
-              <a:t>3</a:t>
-            </a:r>
-            <a:r>
-              <a:rPr>
-                <a:solidFill>
-                  <a:srgbClr val="003B4F"/>
-                </a:solidFill>
-                <a:latin typeface="Courier"/>
-              </a:rPr>
-              <a:t>)                  </a:t>
-            </a:r>
-            <a:r>
-              <a:rPr>
-                <a:solidFill>
-                  <a:srgbClr val="5E5E5E"/>
-                </a:solidFill>
-                <a:latin typeface="Courier"/>
-              </a:rPr>
-              <a:t># take tree_df, THEN show first 3 rows</a:t>
-            </a:r>
-          </a:p>
-          <a:p>
-            <a:pPr lvl="0" indent="0" marL="0">
-              <a:buNone/>
-            </a:pPr>
-            <a:r>
-              <a:rPr/>
-              <a:t>In Lecture 03 we will chain more steps together.</a:t>
+              <a:t># take tree_df, THEN show 3 rows</a:t>
             </a:r>
           </a:p>
           <a:p>
@@ -9184,7 +9013,7 @@
             </a:r>
             <a:r>
               <a:rPr sz="2000"/>
-              <a:t> = “take what is on the left and feed it to the function on the right.”</a:t>
+              <a:t> = “take what is on the left and feed it to the function on the right.” In Lecture 03 we chain more steps together.</a:t>
             </a:r>
           </a:p>
         </p:txBody>
@@ -9205,8 +9034,8 @@
         </p:blipFill>
         <p:spPr bwMode="auto">
           <a:xfrm>
-            <a:off x="4660900" y="660400"/>
-            <a:ext cx="4089400" cy="3302000"/>
+            <a:off x="4495800" y="787400"/>
+            <a:ext cx="4406900" cy="3556000"/>
           </a:xfrm>
           <a:prstGeom prst="rect">
             <a:avLst/>
@@ -9219,105 +9048,6 @@
           </a:ln>
         </p:spPr>
       </p:pic>
-      <p:sp>
-        <p:nvSpPr>
-          <p:cNvPr id="1" name="TextBox 3"/>
-          <p:cNvSpPr txBox="1"/>
-          <p:nvPr>
-            <p:ph idx="1"/>
-          </p:nvPr>
-        </p:nvSpPr>
-        <p:spPr>
-          <a:xfrm>
-            <a:off x="4495800" y="3962400"/>
-            <a:ext cx="4406900" cy="508000"/>
-          </a:xfrm>
-          <a:prstGeom prst="rect">
-            <a:avLst/>
-          </a:prstGeom>
-          <a:noFill/>
-        </p:spPr>
-        <p:txBody>
-          <a:bodyPr/>
-          <a:lstStyle/>
-          <a:p>
-            <a:pPr lvl="0" indent="0" marL="0" algn="ctr">
-              <a:buNone/>
-            </a:pPr>
-            <a:r>
-              <a:rPr/>
-              <a:t>Diagram of the pipe operator: tree_df flows down into filter(shade == “sunny”), then flows down into summary(), read as “take tree_df, then filter, then summarise.”</a:t>
-            </a:r>
-          </a:p>
-        </p:txBody>
-      </p:sp>
-      <p:sp>
-        <p:nvSpPr>
-          <p:cNvPr id="4" name="Content Placeholder 3"/>
-          <p:cNvSpPr>
-            <a:spLocks noGrp="1"/>
-          </p:cNvSpPr>
-          <p:nvPr>
-            <p:ph idx="2" sz="half"/>
-          </p:nvPr>
-        </p:nvSpPr>
-        <p:spPr/>
-        <p:txBody>
-          <a:bodyPr/>
-          <a:lstStyle/>
-          <a:p>
-            <a:pPr lvl="0" indent="0" marL="1270000">
-              <a:buNone/>
-            </a:pPr>
-            <a:r>
-              <a:rPr sz="2000" b="1"/>
-              <a:t>Note</a:t>
-            </a:r>
-          </a:p>
-          <a:p>
-            <a:pPr lvl="0" indent="0" marL="1270000">
-              <a:buNone/>
-            </a:pPr>
-            <a:r>
-              <a:rPr sz="2000" b="1"/>
-              <a:t>Two pipes — same idea:</a:t>
-            </a:r>
-          </a:p>
-          <a:p>
-            <a:pPr lvl="0"/>
-            <a:r>
-              <a:rPr sz="2000">
-                <a:latin typeface="Courier"/>
-              </a:rPr>
-              <a:t>%&gt;%</a:t>
-            </a:r>
-            <a:r>
-              <a:rPr sz="2000"/>
-              <a:t> — from tidyverse (we use this one)</a:t>
-            </a:r>
-          </a:p>
-          <a:p>
-            <a:pPr lvl="0"/>
-            <a:r>
-              <a:rPr sz="2000">
-                <a:latin typeface="Courier"/>
-              </a:rPr>
-              <a:t>|&gt;</a:t>
-            </a:r>
-            <a:r>
-              <a:rPr sz="2000"/>
-              <a:t> — built into R 4.1+ (the “native pipe”)</a:t>
-            </a:r>
-          </a:p>
-          <a:p>
-            <a:pPr lvl="0"/>
-            <a:r>
-              <a:rPr sz="2000"/>
-              <a:t>They behave identically for everything in this course but I prefer the %&gt;%</a:t>
-            </a:r>
-          </a:p>
-        </p:txBody>
-      </p:sp>
     </p:spTree>
   </p:cSld>
 </p:sld>
@@ -11080,19 +10810,6 @@
             <a:pPr lvl="0" indent="0" marL="1270000">
               <a:buNone/>
             </a:pPr>
-            <a:r>
-              <a:rPr sz="2000"/>
-              <a:t>Screenshot of the Save Plot dialog in Positron’s Plots pane, with the leaf mass boxplot ready to save as a PNG.</a:t>
-            </a:r>
-          </a:p>
-          <a:p>
-            <a:pPr lvl="0" indent="0" marL="1270000">
-              <a:buNone/>
-            </a:pPr>
-            <a:r>
-              <a:rPr sz="2000"/>
-              <a:t>Screenshot of the Save Plot dialog in Positron’s Plots pane, with the leaf mass boxplot ready to save as a PNG.</a:t>
-            </a:r>
           </a:p>
         </p:txBody>
       </p:sp>
@@ -11899,8 +11616,8 @@
         </p:blipFill>
         <p:spPr bwMode="auto">
           <a:xfrm>
-            <a:off x="5143500" y="660400"/>
-            <a:ext cx="3111500" cy="3302000"/>
+            <a:off x="4902200" y="660400"/>
+            <a:ext cx="3581400" cy="3810000"/>
           </a:xfrm>
           <a:prstGeom prst="rect">
             <a:avLst/>
@@ -11913,38 +11630,6 @@
           </a:ln>
         </p:spPr>
       </p:pic>
-      <p:sp>
-        <p:nvSpPr>
-          <p:cNvPr id="1" name="TextBox 3"/>
-          <p:cNvSpPr txBox="1"/>
-          <p:nvPr>
-            <p:ph idx="1"/>
-          </p:nvPr>
-        </p:nvSpPr>
-        <p:spPr>
-          <a:xfrm>
-            <a:off x="4495800" y="3962400"/>
-            <a:ext cx="4406900" cy="508000"/>
-          </a:xfrm>
-          <a:prstGeom prst="rect">
-            <a:avLst/>
-          </a:prstGeom>
-          <a:noFill/>
-        </p:spPr>
-        <p:txBody>
-          <a:bodyPr/>
-          <a:lstStyle/>
-          <a:p>
-            <a:pPr lvl="0" indent="0" marL="0" algn="ctr">
-              <a:buNone/>
-            </a:pPr>
-            <a:r>
-              <a:rPr/>
-              <a:t>Diagram showing ggplot’s layered construction: a data frame, then an aes() mapping, then a geom, stacked with + into a finished plot.</a:t>
-            </a:r>
-          </a:p>
-        </p:txBody>
-      </p:sp>
     </p:spTree>
   </p:cSld>
 </p:sld>
@@ -12594,8 +12279,8 @@
         </p:blipFill>
         <p:spPr bwMode="auto">
           <a:xfrm>
-            <a:off x="4965700" y="660400"/>
-            <a:ext cx="3454400" cy="3302000"/>
+            <a:off x="4699000" y="660400"/>
+            <a:ext cx="3987800" cy="3810000"/>
           </a:xfrm>
           <a:prstGeom prst="rect">
             <a:avLst/>
@@ -12608,38 +12293,6 @@
           </a:ln>
         </p:spPr>
       </p:pic>
-      <p:sp>
-        <p:nvSpPr>
-          <p:cNvPr id="1" name="TextBox 3"/>
-          <p:cNvSpPr txBox="1"/>
-          <p:nvPr>
-            <p:ph idx="1"/>
-          </p:nvPr>
-        </p:nvSpPr>
-        <p:spPr>
-          <a:xfrm>
-            <a:off x="4495800" y="3962400"/>
-            <a:ext cx="4406900" cy="508000"/>
-          </a:xfrm>
-          <a:prstGeom prst="rect">
-            <a:avLst/>
-          </a:prstGeom>
-          <a:noFill/>
-        </p:spPr>
-        <p:txBody>
-          <a:bodyPr/>
-          <a:lstStyle/>
-          <a:p>
-            <a:pPr lvl="0" indent="0" marL="0" algn="ctr">
-              <a:buNone/>
-            </a:pPr>
-            <a:r>
-              <a:rPr/>
-              <a:t>Screenshot of the Positron IDE welcome screen, showing its Console/Terminal, Variables, and Plots panes.</a:t>
-            </a:r>
-          </a:p>
-        </p:txBody>
-      </p:sp>
     </p:spTree>
   </p:cSld>
 </p:sld>
@@ -13122,8 +12775,8 @@
         </p:blipFill>
         <p:spPr bwMode="auto">
           <a:xfrm>
-            <a:off x="4965700" y="660400"/>
-            <a:ext cx="3454400" cy="3302000"/>
+            <a:off x="4699000" y="660400"/>
+            <a:ext cx="3987800" cy="3810000"/>
           </a:xfrm>
           <a:prstGeom prst="rect">
             <a:avLst/>
@@ -13136,38 +12789,6 @@
           </a:ln>
         </p:spPr>
       </p:pic>
-      <p:sp>
-        <p:nvSpPr>
-          <p:cNvPr id="1" name="TextBox 3"/>
-          <p:cNvSpPr txBox="1"/>
-          <p:nvPr>
-            <p:ph idx="1"/>
-          </p:nvPr>
-        </p:nvSpPr>
-        <p:spPr>
-          <a:xfrm>
-            <a:off x="4495800" y="3962400"/>
-            <a:ext cx="4406900" cy="508000"/>
-          </a:xfrm>
-          <a:prstGeom prst="rect">
-            <a:avLst/>
-          </a:prstGeom>
-          <a:noFill/>
-        </p:spPr>
-        <p:txBody>
-          <a:bodyPr/>
-          <a:lstStyle/>
-          <a:p>
-            <a:pPr lvl="0" indent="0" marL="0" algn="ctr">
-              <a:buNone/>
-            </a:pPr>
-            <a:r>
-              <a:rPr/>
-              <a:t>Screenshot of the Positron IDE with its Editor, Console/Terminal, Variables, and Plots panes visible.</a:t>
-            </a:r>
-          </a:p>
-        </p:txBody>
-      </p:sp>
     </p:spTree>
   </p:cSld>
 </p:sld>

--- a/docs/content/meeting_r/meeting_r_lecture.pptx
+++ b/docs/content/meeting_r/meeting_r_lecture.pptx
@@ -3370,7 +3370,7 @@
             </a:pPr>
             <a:r>
               <a:rPr/>
-              <a:t>2026-10-05</a:t>
+              <a:t>2026-10-08</a:t>
             </a:r>
           </a:p>
         </p:txBody>

--- a/docs/content/meeting_r/meeting_r_lecture.pptx
+++ b/docs/content/meeting_r/meeting_r_lecture.pptx
@@ -3370,7 +3370,7 @@
             </a:pPr>
             <a:r>
               <a:rPr/>
-              <a:t>2026-10-08</a:t>
+              <a:t>2026-10-09</a:t>
             </a:r>
           </a:p>
         </p:txBody>

--- a/docs/content/meeting_r/meeting_r_lecture.pptx
+++ b/docs/content/meeting_r/meeting_r_lecture.pptx
@@ -3370,7 +3370,7 @@
             </a:pPr>
             <a:r>
               <a:rPr/>
-              <a:t>2026-10-09</a:t>
+              <a:t>2026-10-19</a:t>
             </a:r>
           </a:p>
         </p:txBody>

--- a/docs/content/meeting_r/meeting_r_lecture.pptx
+++ b/docs/content/meeting_r/meeting_r_lecture.pptx
@@ -3370,7 +3370,7 @@
             </a:pPr>
             <a:r>
               <a:rPr/>
-              <a:t>2026-10-19</a:t>
+              <a:t>2026-10-22</a:t>
             </a:r>
           </a:p>
         </p:txBody>
